--- a/prompter-moscow/presentation/konferenciya/oranzhevye-listy.pptx
+++ b/prompter-moscow/presentation/konferenciya/oranzhevye-listy.pptx
@@ -3118,7 +3118,7 @@
       </p:pic>
       <p:sp>
         <p:nvSpPr>
-          <p:cNvPr id="3" name="Rectangle 2"/>
+          <p:cNvPr id="3" name="Рамка"/>
           <p:cNvSpPr/>
           <p:nvPr/>
         </p:nvSpPr>
@@ -3176,17 +3176,95 @@
         </p:blipFill>
         <p:spPr>
           <a:xfrm>
-            <a:off x="685800" y="457200"/>
-            <a:ext cx="480290" cy="457200"/>
+            <a:off x="685800" y="411480"/>
+            <a:ext cx="633984" cy="603504"/>
           </a:xfrm>
           <a:prstGeom prst="rect">
             <a:avLst/>
           </a:prstGeom>
         </p:spPr>
       </p:pic>
+      <p:sp>
+        <p:nvSpPr>
+          <p:cNvPr id="5" name="TextBox 4"/>
+          <p:cNvSpPr txBox="1"/>
+          <p:nvPr/>
+        </p:nvSpPr>
+        <p:spPr>
+          <a:xfrm>
+            <a:off x="1466088" y="429768"/>
+            <a:ext cx="2926080" cy="365760"/>
+          </a:xfrm>
+          <a:prstGeom prst="rect">
+            <a:avLst/>
+          </a:prstGeom>
+          <a:noFill/>
+        </p:spPr>
+        <p:txBody>
+          <a:bodyPr wrap="square" lIns="0" rIns="0" tIns="0" bIns="0" anchor="t">
+            <a:spAutoFit/>
+          </a:bodyPr>
+          <a:lstStyle/>
+          <a:p>
+            <a:pPr algn="l">
+              <a:lnSpc>
+                <a:spcPct val="110000"/>
+              </a:lnSpc>
+            </a:pPr>
+            <a:r>
+              <a:rPr sz="2000" b="1">
+                <a:solidFill>
+                  <a:srgbClr val="FFFFFF"/>
+                </a:solidFill>
+                <a:latin typeface="Unbounded"/>
+              </a:rPr>
+              <a:t>ГенИИ</a:t>
+            </a:r>
+          </a:p>
+        </p:txBody>
+      </p:sp>
+      <p:sp>
+        <p:nvSpPr>
+          <p:cNvPr id="6" name="TextBox 5"/>
+          <p:cNvSpPr txBox="1"/>
+          <p:nvPr/>
+        </p:nvSpPr>
+        <p:spPr>
+          <a:xfrm>
+            <a:off x="1466088" y="777240"/>
+            <a:ext cx="2926080" cy="219456"/>
+          </a:xfrm>
+          <a:prstGeom prst="rect">
+            <a:avLst/>
+          </a:prstGeom>
+          <a:noFill/>
+        </p:spPr>
+        <p:txBody>
+          <a:bodyPr wrap="square" lIns="0" rIns="0" tIns="0" bIns="0" anchor="t">
+            <a:spAutoFit/>
+          </a:bodyPr>
+          <a:lstStyle/>
+          <a:p>
+            <a:pPr algn="l">
+              <a:lnSpc>
+                <a:spcPct val="120000"/>
+              </a:lnSpc>
+            </a:pPr>
+            <a:r>
+              <a:rPr sz="1050" b="0">
+                <a:solidFill>
+                  <a:srgbClr val="FF8A3D"/>
+                </a:solidFill>
+                <a:latin typeface="Inter"/>
+              </a:rPr>
+              <a:t>genii-ai.ru</a:t>
+            </a:r>
+          </a:p>
+        </p:txBody>
+      </p:sp>
       <p:pic>
         <p:nvPicPr>
-          <p:cNvPr id="5" name="Picture 4" descr="logo.png"/>
+          <p:cNvPr id="7" name="Picture 6" descr="logo.png"/>
           <p:cNvPicPr>
             <a:picLocks noChangeAspect="1"/>
           </p:cNvPicPr>
@@ -3200,8 +3278,8 @@
         </p:blipFill>
         <p:spPr>
           <a:xfrm>
-            <a:off x="11048695" y="457200"/>
-            <a:ext cx="457200" cy="457200"/>
+            <a:off x="11121847" y="411480"/>
+            <a:ext cx="384048" cy="384048"/>
           </a:xfrm>
           <a:prstGeom prst="rect">
             <a:avLst/>
@@ -3210,52 +3288,13 @@
       </p:pic>
       <p:sp>
         <p:nvSpPr>
-          <p:cNvPr id="6" name="TextBox 5"/>
+          <p:cNvPr id="8" name="TextBox 7"/>
           <p:cNvSpPr txBox="1"/>
           <p:nvPr/>
         </p:nvSpPr>
         <p:spPr>
           <a:xfrm>
-            <a:off x="685800" y="987552"/>
-            <a:ext cx="2743200" cy="201168"/>
-          </a:xfrm>
-          <a:prstGeom prst="rect">
-            <a:avLst/>
-          </a:prstGeom>
-          <a:noFill/>
-        </p:spPr>
-        <p:txBody>
-          <a:bodyPr wrap="square" lIns="0" rIns="0" tIns="0" bIns="0" anchor="t">
-            <a:spAutoFit/>
-          </a:bodyPr>
-          <a:lstStyle/>
-          <a:p>
-            <a:pPr algn="l">
-              <a:lnSpc>
-                <a:spcPct val="120000"/>
-              </a:lnSpc>
-            </a:pPr>
-            <a:r>
-              <a:rPr sz="950" b="0">
-                <a:solidFill>
-                  <a:srgbClr val="A2978E"/>
-                </a:solidFill>
-                <a:latin typeface="Inter"/>
-              </a:rPr>
-              <a:t>ГенИИ</a:t>
-            </a:r>
-          </a:p>
-        </p:txBody>
-      </p:sp>
-      <p:sp>
-        <p:nvSpPr>
-          <p:cNvPr id="7" name="TextBox 6"/>
-          <p:cNvSpPr txBox="1"/>
-          <p:nvPr/>
-        </p:nvSpPr>
-        <p:spPr>
-          <a:xfrm>
-            <a:off x="8762695" y="987552"/>
+            <a:off x="8762695" y="850392"/>
             <a:ext cx="2743200" cy="201168"/>
           </a:xfrm>
           <a:prstGeom prst="rect">
@@ -3288,7 +3327,7 @@
       </p:sp>
       <p:sp>
         <p:nvSpPr>
-          <p:cNvPr id="8" name="TextBox 7"/>
+          <p:cNvPr id="9" name="TextBox 8"/>
           <p:cNvSpPr txBox="1"/>
           <p:nvPr/>
         </p:nvSpPr>
@@ -3327,7 +3366,7 @@
       </p:sp>
       <p:sp>
         <p:nvSpPr>
-          <p:cNvPr id="9" name="TextBox 8"/>
+          <p:cNvPr id="10" name="TextBox 9"/>
           <p:cNvSpPr txBox="1"/>
           <p:nvPr/>
         </p:nvSpPr>
@@ -3366,7 +3405,7 @@
       </p:sp>
       <p:sp>
         <p:nvSpPr>
-          <p:cNvPr id="10" name="Rectangle 9"/>
+          <p:cNvPr id="11" name="Rectangle 10"/>
           <p:cNvSpPr/>
           <p:nvPr/>
         </p:nvSpPr>
@@ -3410,7 +3449,7 @@
       </p:sp>
       <p:sp>
         <p:nvSpPr>
-          <p:cNvPr id="11" name="TextBox 10"/>
+          <p:cNvPr id="12" name="TextBox 11"/>
           <p:cNvSpPr txBox="1"/>
           <p:nvPr/>
         </p:nvSpPr>
@@ -3458,7 +3497,7 @@
       </p:sp>
       <p:sp>
         <p:nvSpPr>
-          <p:cNvPr id="12" name="Rectangle 11"/>
+          <p:cNvPr id="13" name="Rectangle 12"/>
           <p:cNvSpPr/>
           <p:nvPr/>
         </p:nvSpPr>
@@ -3502,7 +3541,7 @@
       </p:sp>
       <p:sp>
         <p:nvSpPr>
-          <p:cNvPr id="13" name="TextBox 12"/>
+          <p:cNvPr id="14" name="TextBox 13"/>
           <p:cNvSpPr txBox="1"/>
           <p:nvPr/>
         </p:nvSpPr>
@@ -3550,7 +3589,7 @@
       </p:sp>
       <p:sp>
         <p:nvSpPr>
-          <p:cNvPr id="14" name="TextBox 13"/>
+          <p:cNvPr id="15" name="TextBox 14"/>
           <p:cNvSpPr txBox="1"/>
           <p:nvPr/>
         </p:nvSpPr>
@@ -3631,7 +3670,7 @@
       </p:pic>
       <p:sp>
         <p:nvSpPr>
-          <p:cNvPr id="3" name="Rectangle 2"/>
+          <p:cNvPr id="3" name="Рамка"/>
           <p:cNvSpPr/>
           <p:nvPr/>
         </p:nvSpPr>
@@ -3689,17 +3728,95 @@
         </p:blipFill>
         <p:spPr>
           <a:xfrm>
-            <a:off x="685800" y="457200"/>
-            <a:ext cx="480290" cy="457200"/>
+            <a:off x="685800" y="411480"/>
+            <a:ext cx="633984" cy="603504"/>
           </a:xfrm>
           <a:prstGeom prst="rect">
             <a:avLst/>
           </a:prstGeom>
         </p:spPr>
       </p:pic>
+      <p:sp>
+        <p:nvSpPr>
+          <p:cNvPr id="5" name="TextBox 4"/>
+          <p:cNvSpPr txBox="1"/>
+          <p:nvPr/>
+        </p:nvSpPr>
+        <p:spPr>
+          <a:xfrm>
+            <a:off x="1466088" y="429768"/>
+            <a:ext cx="2926080" cy="365760"/>
+          </a:xfrm>
+          <a:prstGeom prst="rect">
+            <a:avLst/>
+          </a:prstGeom>
+          <a:noFill/>
+        </p:spPr>
+        <p:txBody>
+          <a:bodyPr wrap="square" lIns="0" rIns="0" tIns="0" bIns="0" anchor="t">
+            <a:spAutoFit/>
+          </a:bodyPr>
+          <a:lstStyle/>
+          <a:p>
+            <a:pPr algn="l">
+              <a:lnSpc>
+                <a:spcPct val="110000"/>
+              </a:lnSpc>
+            </a:pPr>
+            <a:r>
+              <a:rPr sz="2000" b="1">
+                <a:solidFill>
+                  <a:srgbClr val="FFFFFF"/>
+                </a:solidFill>
+                <a:latin typeface="Unbounded"/>
+              </a:rPr>
+              <a:t>ГенИИ</a:t>
+            </a:r>
+          </a:p>
+        </p:txBody>
+      </p:sp>
+      <p:sp>
+        <p:nvSpPr>
+          <p:cNvPr id="6" name="TextBox 5"/>
+          <p:cNvSpPr txBox="1"/>
+          <p:nvPr/>
+        </p:nvSpPr>
+        <p:spPr>
+          <a:xfrm>
+            <a:off x="1466088" y="777240"/>
+            <a:ext cx="2926080" cy="219456"/>
+          </a:xfrm>
+          <a:prstGeom prst="rect">
+            <a:avLst/>
+          </a:prstGeom>
+          <a:noFill/>
+        </p:spPr>
+        <p:txBody>
+          <a:bodyPr wrap="square" lIns="0" rIns="0" tIns="0" bIns="0" anchor="t">
+            <a:spAutoFit/>
+          </a:bodyPr>
+          <a:lstStyle/>
+          <a:p>
+            <a:pPr algn="l">
+              <a:lnSpc>
+                <a:spcPct val="120000"/>
+              </a:lnSpc>
+            </a:pPr>
+            <a:r>
+              <a:rPr sz="1050" b="0">
+                <a:solidFill>
+                  <a:srgbClr val="FF8A3D"/>
+                </a:solidFill>
+                <a:latin typeface="Inter"/>
+              </a:rPr>
+              <a:t>genii-ai.ru</a:t>
+            </a:r>
+          </a:p>
+        </p:txBody>
+      </p:sp>
       <p:pic>
         <p:nvPicPr>
-          <p:cNvPr id="5" name="Picture 4" descr="logo.png"/>
+          <p:cNvPr id="7" name="Picture 6" descr="logo.png"/>
           <p:cNvPicPr>
             <a:picLocks noChangeAspect="1"/>
           </p:cNvPicPr>
@@ -3713,8 +3830,8 @@
         </p:blipFill>
         <p:spPr>
           <a:xfrm>
-            <a:off x="11048695" y="457200"/>
-            <a:ext cx="457200" cy="457200"/>
+            <a:off x="11121847" y="411480"/>
+            <a:ext cx="384048" cy="384048"/>
           </a:xfrm>
           <a:prstGeom prst="rect">
             <a:avLst/>
@@ -3723,52 +3840,13 @@
       </p:pic>
       <p:sp>
         <p:nvSpPr>
-          <p:cNvPr id="6" name="TextBox 5"/>
+          <p:cNvPr id="8" name="TextBox 7"/>
           <p:cNvSpPr txBox="1"/>
           <p:nvPr/>
         </p:nvSpPr>
         <p:spPr>
           <a:xfrm>
-            <a:off x="685800" y="987552"/>
-            <a:ext cx="2743200" cy="201168"/>
-          </a:xfrm>
-          <a:prstGeom prst="rect">
-            <a:avLst/>
-          </a:prstGeom>
-          <a:noFill/>
-        </p:spPr>
-        <p:txBody>
-          <a:bodyPr wrap="square" lIns="0" rIns="0" tIns="0" bIns="0" anchor="t">
-            <a:spAutoFit/>
-          </a:bodyPr>
-          <a:lstStyle/>
-          <a:p>
-            <a:pPr algn="l">
-              <a:lnSpc>
-                <a:spcPct val="120000"/>
-              </a:lnSpc>
-            </a:pPr>
-            <a:r>
-              <a:rPr sz="950" b="0">
-                <a:solidFill>
-                  <a:srgbClr val="A2978E"/>
-                </a:solidFill>
-                <a:latin typeface="Inter"/>
-              </a:rPr>
-              <a:t>ГенИИ</a:t>
-            </a:r>
-          </a:p>
-        </p:txBody>
-      </p:sp>
-      <p:sp>
-        <p:nvSpPr>
-          <p:cNvPr id="7" name="TextBox 6"/>
-          <p:cNvSpPr txBox="1"/>
-          <p:nvPr/>
-        </p:nvSpPr>
-        <p:spPr>
-          <a:xfrm>
-            <a:off x="8762695" y="987552"/>
+            <a:off x="8762695" y="850392"/>
             <a:ext cx="2743200" cy="201168"/>
           </a:xfrm>
           <a:prstGeom prst="rect">
@@ -3801,7 +3879,7 @@
       </p:sp>
       <p:sp>
         <p:nvSpPr>
-          <p:cNvPr id="8" name="TextBox 7"/>
+          <p:cNvPr id="9" name="TextBox 8"/>
           <p:cNvSpPr txBox="1"/>
           <p:nvPr/>
         </p:nvSpPr>
@@ -3840,7 +3918,7 @@
       </p:sp>
       <p:sp>
         <p:nvSpPr>
-          <p:cNvPr id="9" name="TextBox 8"/>
+          <p:cNvPr id="10" name="TextBox 9"/>
           <p:cNvSpPr txBox="1"/>
           <p:nvPr/>
         </p:nvSpPr>
@@ -3879,7 +3957,7 @@
       </p:sp>
       <p:sp>
         <p:nvSpPr>
-          <p:cNvPr id="10" name="Rectangle 9"/>
+          <p:cNvPr id="11" name="Rectangle 10"/>
           <p:cNvSpPr/>
           <p:nvPr/>
         </p:nvSpPr>
@@ -3923,7 +4001,7 @@
       </p:sp>
       <p:sp>
         <p:nvSpPr>
-          <p:cNvPr id="11" name="TextBox 10"/>
+          <p:cNvPr id="12" name="TextBox 11"/>
           <p:cNvSpPr txBox="1"/>
           <p:nvPr/>
         </p:nvSpPr>
@@ -3971,7 +4049,7 @@
       </p:sp>
       <p:sp>
         <p:nvSpPr>
-          <p:cNvPr id="12" name="Rectangle 11"/>
+          <p:cNvPr id="13" name="Rectangle 12"/>
           <p:cNvSpPr/>
           <p:nvPr/>
         </p:nvSpPr>
@@ -4015,7 +4093,7 @@
       </p:sp>
       <p:sp>
         <p:nvSpPr>
-          <p:cNvPr id="13" name="TextBox 12"/>
+          <p:cNvPr id="14" name="TextBox 13"/>
           <p:cNvSpPr txBox="1"/>
           <p:nvPr/>
         </p:nvSpPr>
@@ -4096,7 +4174,7 @@
       </p:pic>
       <p:sp>
         <p:nvSpPr>
-          <p:cNvPr id="3" name="Rectangle 2"/>
+          <p:cNvPr id="3" name="Рамка"/>
           <p:cNvSpPr/>
           <p:nvPr/>
         </p:nvSpPr>
@@ -4154,17 +4232,95 @@
         </p:blipFill>
         <p:spPr>
           <a:xfrm>
-            <a:off x="685800" y="457200"/>
-            <a:ext cx="480290" cy="457200"/>
+            <a:off x="685800" y="411480"/>
+            <a:ext cx="633984" cy="603504"/>
           </a:xfrm>
           <a:prstGeom prst="rect">
             <a:avLst/>
           </a:prstGeom>
         </p:spPr>
       </p:pic>
+      <p:sp>
+        <p:nvSpPr>
+          <p:cNvPr id="5" name="TextBox 4"/>
+          <p:cNvSpPr txBox="1"/>
+          <p:nvPr/>
+        </p:nvSpPr>
+        <p:spPr>
+          <a:xfrm>
+            <a:off x="1466088" y="429768"/>
+            <a:ext cx="2926080" cy="365760"/>
+          </a:xfrm>
+          <a:prstGeom prst="rect">
+            <a:avLst/>
+          </a:prstGeom>
+          <a:noFill/>
+        </p:spPr>
+        <p:txBody>
+          <a:bodyPr wrap="square" lIns="0" rIns="0" tIns="0" bIns="0" anchor="t">
+            <a:spAutoFit/>
+          </a:bodyPr>
+          <a:lstStyle/>
+          <a:p>
+            <a:pPr algn="l">
+              <a:lnSpc>
+                <a:spcPct val="110000"/>
+              </a:lnSpc>
+            </a:pPr>
+            <a:r>
+              <a:rPr sz="2000" b="1">
+                <a:solidFill>
+                  <a:srgbClr val="FFFFFF"/>
+                </a:solidFill>
+                <a:latin typeface="Unbounded"/>
+              </a:rPr>
+              <a:t>ГенИИ</a:t>
+            </a:r>
+          </a:p>
+        </p:txBody>
+      </p:sp>
+      <p:sp>
+        <p:nvSpPr>
+          <p:cNvPr id="6" name="TextBox 5"/>
+          <p:cNvSpPr txBox="1"/>
+          <p:nvPr/>
+        </p:nvSpPr>
+        <p:spPr>
+          <a:xfrm>
+            <a:off x="1466088" y="777240"/>
+            <a:ext cx="2926080" cy="219456"/>
+          </a:xfrm>
+          <a:prstGeom prst="rect">
+            <a:avLst/>
+          </a:prstGeom>
+          <a:noFill/>
+        </p:spPr>
+        <p:txBody>
+          <a:bodyPr wrap="square" lIns="0" rIns="0" tIns="0" bIns="0" anchor="t">
+            <a:spAutoFit/>
+          </a:bodyPr>
+          <a:lstStyle/>
+          <a:p>
+            <a:pPr algn="l">
+              <a:lnSpc>
+                <a:spcPct val="120000"/>
+              </a:lnSpc>
+            </a:pPr>
+            <a:r>
+              <a:rPr sz="1050" b="0">
+                <a:solidFill>
+                  <a:srgbClr val="FF8A3D"/>
+                </a:solidFill>
+                <a:latin typeface="Inter"/>
+              </a:rPr>
+              <a:t>genii-ai.ru</a:t>
+            </a:r>
+          </a:p>
+        </p:txBody>
+      </p:sp>
       <p:pic>
         <p:nvPicPr>
-          <p:cNvPr id="5" name="Picture 4" descr="logo.png"/>
+          <p:cNvPr id="7" name="Picture 6" descr="logo.png"/>
           <p:cNvPicPr>
             <a:picLocks noChangeAspect="1"/>
           </p:cNvPicPr>
@@ -4178,8 +4334,8 @@
         </p:blipFill>
         <p:spPr>
           <a:xfrm>
-            <a:off x="11048695" y="457200"/>
-            <a:ext cx="457200" cy="457200"/>
+            <a:off x="11121847" y="411480"/>
+            <a:ext cx="384048" cy="384048"/>
           </a:xfrm>
           <a:prstGeom prst="rect">
             <a:avLst/>
@@ -4188,52 +4344,13 @@
       </p:pic>
       <p:sp>
         <p:nvSpPr>
-          <p:cNvPr id="6" name="TextBox 5"/>
+          <p:cNvPr id="8" name="TextBox 7"/>
           <p:cNvSpPr txBox="1"/>
           <p:nvPr/>
         </p:nvSpPr>
         <p:spPr>
           <a:xfrm>
-            <a:off x="685800" y="987552"/>
-            <a:ext cx="2743200" cy="201168"/>
-          </a:xfrm>
-          <a:prstGeom prst="rect">
-            <a:avLst/>
-          </a:prstGeom>
-          <a:noFill/>
-        </p:spPr>
-        <p:txBody>
-          <a:bodyPr wrap="square" lIns="0" rIns="0" tIns="0" bIns="0" anchor="t">
-            <a:spAutoFit/>
-          </a:bodyPr>
-          <a:lstStyle/>
-          <a:p>
-            <a:pPr algn="l">
-              <a:lnSpc>
-                <a:spcPct val="120000"/>
-              </a:lnSpc>
-            </a:pPr>
-            <a:r>
-              <a:rPr sz="950" b="0">
-                <a:solidFill>
-                  <a:srgbClr val="A2978E"/>
-                </a:solidFill>
-                <a:latin typeface="Inter"/>
-              </a:rPr>
-              <a:t>ГенИИ</a:t>
-            </a:r>
-          </a:p>
-        </p:txBody>
-      </p:sp>
-      <p:sp>
-        <p:nvSpPr>
-          <p:cNvPr id="7" name="TextBox 6"/>
-          <p:cNvSpPr txBox="1"/>
-          <p:nvPr/>
-        </p:nvSpPr>
-        <p:spPr>
-          <a:xfrm>
-            <a:off x="8762695" y="987552"/>
+            <a:off x="8762695" y="850392"/>
             <a:ext cx="2743200" cy="201168"/>
           </a:xfrm>
           <a:prstGeom prst="rect">
@@ -4266,7 +4383,7 @@
       </p:sp>
       <p:sp>
         <p:nvSpPr>
-          <p:cNvPr id="8" name="TextBox 7"/>
+          <p:cNvPr id="9" name="TextBox 8"/>
           <p:cNvSpPr txBox="1"/>
           <p:nvPr/>
         </p:nvSpPr>
@@ -4305,7 +4422,7 @@
       </p:sp>
       <p:sp>
         <p:nvSpPr>
-          <p:cNvPr id="9" name="TextBox 8"/>
+          <p:cNvPr id="10" name="TextBox 9"/>
           <p:cNvSpPr txBox="1"/>
           <p:nvPr/>
         </p:nvSpPr>
@@ -4333,7 +4450,7 @@
             <a:r>
               <a:rPr sz="7800" b="1">
                 <a:solidFill>
-                  <a:srgbClr val="4ADE80"/>
+                  <a:srgbClr val="FF9A4D"/>
                 </a:solidFill>
                 <a:latin typeface="Unbounded"/>
               </a:rPr>
@@ -4344,7 +4461,7 @@
       </p:sp>
       <p:sp>
         <p:nvSpPr>
-          <p:cNvPr id="10" name="TextBox 9"/>
+          <p:cNvPr id="11" name="TextBox 10"/>
           <p:cNvSpPr txBox="1"/>
           <p:nvPr/>
         </p:nvSpPr>
@@ -4383,7 +4500,7 @@
       </p:sp>
       <p:sp>
         <p:nvSpPr>
-          <p:cNvPr id="11" name="TextBox 10"/>
+          <p:cNvPr id="12" name="TextBox 11"/>
           <p:cNvSpPr txBox="1"/>
           <p:nvPr/>
         </p:nvSpPr>
@@ -4422,7 +4539,7 @@
       </p:sp>
       <p:sp>
         <p:nvSpPr>
-          <p:cNvPr id="12" name="Rectangle 11"/>
+          <p:cNvPr id="13" name="Rectangle 12"/>
           <p:cNvSpPr/>
           <p:nvPr/>
         </p:nvSpPr>
@@ -4466,7 +4583,7 @@
       </p:sp>
       <p:sp>
         <p:nvSpPr>
-          <p:cNvPr id="13" name="TextBox 12"/>
+          <p:cNvPr id="14" name="TextBox 13"/>
           <p:cNvSpPr txBox="1"/>
           <p:nvPr/>
         </p:nvSpPr>
@@ -4556,7 +4673,7 @@
       </p:pic>
       <p:sp>
         <p:nvSpPr>
-          <p:cNvPr id="3" name="Rectangle 2"/>
+          <p:cNvPr id="3" name="Рамка"/>
           <p:cNvSpPr/>
           <p:nvPr/>
         </p:nvSpPr>
@@ -4614,17 +4731,95 @@
         </p:blipFill>
         <p:spPr>
           <a:xfrm>
-            <a:off x="685800" y="457200"/>
-            <a:ext cx="480290" cy="457200"/>
+            <a:off x="685800" y="411480"/>
+            <a:ext cx="633984" cy="603504"/>
           </a:xfrm>
           <a:prstGeom prst="rect">
             <a:avLst/>
           </a:prstGeom>
         </p:spPr>
       </p:pic>
+      <p:sp>
+        <p:nvSpPr>
+          <p:cNvPr id="5" name="TextBox 4"/>
+          <p:cNvSpPr txBox="1"/>
+          <p:nvPr/>
+        </p:nvSpPr>
+        <p:spPr>
+          <a:xfrm>
+            <a:off x="1466088" y="429768"/>
+            <a:ext cx="2926080" cy="365760"/>
+          </a:xfrm>
+          <a:prstGeom prst="rect">
+            <a:avLst/>
+          </a:prstGeom>
+          <a:noFill/>
+        </p:spPr>
+        <p:txBody>
+          <a:bodyPr wrap="square" lIns="0" rIns="0" tIns="0" bIns="0" anchor="t">
+            <a:spAutoFit/>
+          </a:bodyPr>
+          <a:lstStyle/>
+          <a:p>
+            <a:pPr algn="l">
+              <a:lnSpc>
+                <a:spcPct val="110000"/>
+              </a:lnSpc>
+            </a:pPr>
+            <a:r>
+              <a:rPr sz="2000" b="1">
+                <a:solidFill>
+                  <a:srgbClr val="FFFFFF"/>
+                </a:solidFill>
+                <a:latin typeface="Unbounded"/>
+              </a:rPr>
+              <a:t>ГенИИ</a:t>
+            </a:r>
+          </a:p>
+        </p:txBody>
+      </p:sp>
+      <p:sp>
+        <p:nvSpPr>
+          <p:cNvPr id="6" name="TextBox 5"/>
+          <p:cNvSpPr txBox="1"/>
+          <p:nvPr/>
+        </p:nvSpPr>
+        <p:spPr>
+          <a:xfrm>
+            <a:off x="1466088" y="777240"/>
+            <a:ext cx="2926080" cy="219456"/>
+          </a:xfrm>
+          <a:prstGeom prst="rect">
+            <a:avLst/>
+          </a:prstGeom>
+          <a:noFill/>
+        </p:spPr>
+        <p:txBody>
+          <a:bodyPr wrap="square" lIns="0" rIns="0" tIns="0" bIns="0" anchor="t">
+            <a:spAutoFit/>
+          </a:bodyPr>
+          <a:lstStyle/>
+          <a:p>
+            <a:pPr algn="l">
+              <a:lnSpc>
+                <a:spcPct val="120000"/>
+              </a:lnSpc>
+            </a:pPr>
+            <a:r>
+              <a:rPr sz="1050" b="0">
+                <a:solidFill>
+                  <a:srgbClr val="FF8A3D"/>
+                </a:solidFill>
+                <a:latin typeface="Inter"/>
+              </a:rPr>
+              <a:t>genii-ai.ru</a:t>
+            </a:r>
+          </a:p>
+        </p:txBody>
+      </p:sp>
       <p:pic>
         <p:nvPicPr>
-          <p:cNvPr id="5" name="Picture 4" descr="logo.png"/>
+          <p:cNvPr id="7" name="Picture 6" descr="logo.png"/>
           <p:cNvPicPr>
             <a:picLocks noChangeAspect="1"/>
           </p:cNvPicPr>
@@ -4638,8 +4833,8 @@
         </p:blipFill>
         <p:spPr>
           <a:xfrm>
-            <a:off x="11048695" y="457200"/>
-            <a:ext cx="457200" cy="457200"/>
+            <a:off x="11121847" y="411480"/>
+            <a:ext cx="384048" cy="384048"/>
           </a:xfrm>
           <a:prstGeom prst="rect">
             <a:avLst/>
@@ -4648,52 +4843,13 @@
       </p:pic>
       <p:sp>
         <p:nvSpPr>
-          <p:cNvPr id="6" name="TextBox 5"/>
+          <p:cNvPr id="8" name="TextBox 7"/>
           <p:cNvSpPr txBox="1"/>
           <p:nvPr/>
         </p:nvSpPr>
         <p:spPr>
           <a:xfrm>
-            <a:off x="685800" y="987552"/>
-            <a:ext cx="2743200" cy="201168"/>
-          </a:xfrm>
-          <a:prstGeom prst="rect">
-            <a:avLst/>
-          </a:prstGeom>
-          <a:noFill/>
-        </p:spPr>
-        <p:txBody>
-          <a:bodyPr wrap="square" lIns="0" rIns="0" tIns="0" bIns="0" anchor="t">
-            <a:spAutoFit/>
-          </a:bodyPr>
-          <a:lstStyle/>
-          <a:p>
-            <a:pPr algn="l">
-              <a:lnSpc>
-                <a:spcPct val="120000"/>
-              </a:lnSpc>
-            </a:pPr>
-            <a:r>
-              <a:rPr sz="950" b="0">
-                <a:solidFill>
-                  <a:srgbClr val="A2978E"/>
-                </a:solidFill>
-                <a:latin typeface="Inter"/>
-              </a:rPr>
-              <a:t>ГенИИ</a:t>
-            </a:r>
-          </a:p>
-        </p:txBody>
-      </p:sp>
-      <p:sp>
-        <p:nvSpPr>
-          <p:cNvPr id="7" name="TextBox 6"/>
-          <p:cNvSpPr txBox="1"/>
-          <p:nvPr/>
-        </p:nvSpPr>
-        <p:spPr>
-          <a:xfrm>
-            <a:off x="8762695" y="987552"/>
+            <a:off x="8762695" y="850392"/>
             <a:ext cx="2743200" cy="201168"/>
           </a:xfrm>
           <a:prstGeom prst="rect">
@@ -4726,7 +4882,7 @@
       </p:sp>
       <p:sp>
         <p:nvSpPr>
-          <p:cNvPr id="8" name="TextBox 7"/>
+          <p:cNvPr id="9" name="TextBox 8"/>
           <p:cNvSpPr txBox="1"/>
           <p:nvPr/>
         </p:nvSpPr>
@@ -4765,7 +4921,7 @@
       </p:sp>
       <p:sp>
         <p:nvSpPr>
-          <p:cNvPr id="9" name="TextBox 8"/>
+          <p:cNvPr id="10" name="TextBox 9"/>
           <p:cNvSpPr txBox="1"/>
           <p:nvPr/>
         </p:nvSpPr>
@@ -4793,7 +4949,7 @@
             <a:r>
               <a:rPr sz="9200" b="1">
                 <a:solidFill>
-                  <a:srgbClr val="4ADE80"/>
+                  <a:srgbClr val="FF9A4D"/>
                 </a:solidFill>
                 <a:latin typeface="Unbounded"/>
               </a:rPr>
@@ -4804,7 +4960,7 @@
       </p:sp>
       <p:sp>
         <p:nvSpPr>
-          <p:cNvPr id="10" name="TextBox 9"/>
+          <p:cNvPr id="11" name="TextBox 10"/>
           <p:cNvSpPr txBox="1"/>
           <p:nvPr/>
         </p:nvSpPr>
@@ -4843,7 +4999,7 @@
       </p:sp>
       <p:sp>
         <p:nvSpPr>
-          <p:cNvPr id="11" name="Rectangle 10"/>
+          <p:cNvPr id="12" name="Rectangle 11"/>
           <p:cNvSpPr/>
           <p:nvPr/>
         </p:nvSpPr>
@@ -4856,7 +5012,7 @@
             <a:avLst/>
           </a:prstGeom>
           <a:solidFill>
-            <a:srgbClr val="4ADE80"/>
+            <a:srgbClr val="FF9A4D"/>
           </a:solidFill>
           <a:ln>
             <a:noFill/>
@@ -4887,7 +5043,7 @@
       </p:sp>
       <p:sp>
         <p:nvSpPr>
-          <p:cNvPr id="12" name="TextBox 11"/>
+          <p:cNvPr id="13" name="TextBox 12"/>
           <p:cNvSpPr txBox="1"/>
           <p:nvPr/>
         </p:nvSpPr>
@@ -4935,7 +5091,7 @@
       </p:sp>
       <p:sp>
         <p:nvSpPr>
-          <p:cNvPr id="13" name="TextBox 12"/>
+          <p:cNvPr id="14" name="TextBox 13"/>
           <p:cNvSpPr txBox="1"/>
           <p:nvPr/>
         </p:nvSpPr>
@@ -4974,7 +5130,7 @@
       </p:sp>
       <p:sp>
         <p:nvSpPr>
-          <p:cNvPr id="14" name="Rectangle 13"/>
+          <p:cNvPr id="15" name="Rectangle 14"/>
           <p:cNvSpPr/>
           <p:nvPr/>
         </p:nvSpPr>
@@ -5018,7 +5174,7 @@
       </p:sp>
       <p:sp>
         <p:nvSpPr>
-          <p:cNvPr id="15" name="TextBox 14"/>
+          <p:cNvPr id="16" name="TextBox 15"/>
           <p:cNvSpPr txBox="1"/>
           <p:nvPr/>
         </p:nvSpPr>
@@ -5108,7 +5264,7 @@
       </p:pic>
       <p:sp>
         <p:nvSpPr>
-          <p:cNvPr id="3" name="Rectangle 2"/>
+          <p:cNvPr id="3" name="Рамка"/>
           <p:cNvSpPr/>
           <p:nvPr/>
         </p:nvSpPr>
@@ -5166,17 +5322,95 @@
         </p:blipFill>
         <p:spPr>
           <a:xfrm>
-            <a:off x="685800" y="457200"/>
-            <a:ext cx="480290" cy="457200"/>
+            <a:off x="685800" y="411480"/>
+            <a:ext cx="633984" cy="603504"/>
           </a:xfrm>
           <a:prstGeom prst="rect">
             <a:avLst/>
           </a:prstGeom>
         </p:spPr>
       </p:pic>
+      <p:sp>
+        <p:nvSpPr>
+          <p:cNvPr id="5" name="TextBox 4"/>
+          <p:cNvSpPr txBox="1"/>
+          <p:nvPr/>
+        </p:nvSpPr>
+        <p:spPr>
+          <a:xfrm>
+            <a:off x="1466088" y="429768"/>
+            <a:ext cx="2926080" cy="365760"/>
+          </a:xfrm>
+          <a:prstGeom prst="rect">
+            <a:avLst/>
+          </a:prstGeom>
+          <a:noFill/>
+        </p:spPr>
+        <p:txBody>
+          <a:bodyPr wrap="square" lIns="0" rIns="0" tIns="0" bIns="0" anchor="t">
+            <a:spAutoFit/>
+          </a:bodyPr>
+          <a:lstStyle/>
+          <a:p>
+            <a:pPr algn="l">
+              <a:lnSpc>
+                <a:spcPct val="110000"/>
+              </a:lnSpc>
+            </a:pPr>
+            <a:r>
+              <a:rPr sz="2000" b="1">
+                <a:solidFill>
+                  <a:srgbClr val="FFFFFF"/>
+                </a:solidFill>
+                <a:latin typeface="Unbounded"/>
+              </a:rPr>
+              <a:t>ГенИИ</a:t>
+            </a:r>
+          </a:p>
+        </p:txBody>
+      </p:sp>
+      <p:sp>
+        <p:nvSpPr>
+          <p:cNvPr id="6" name="TextBox 5"/>
+          <p:cNvSpPr txBox="1"/>
+          <p:nvPr/>
+        </p:nvSpPr>
+        <p:spPr>
+          <a:xfrm>
+            <a:off x="1466088" y="777240"/>
+            <a:ext cx="2926080" cy="219456"/>
+          </a:xfrm>
+          <a:prstGeom prst="rect">
+            <a:avLst/>
+          </a:prstGeom>
+          <a:noFill/>
+        </p:spPr>
+        <p:txBody>
+          <a:bodyPr wrap="square" lIns="0" rIns="0" tIns="0" bIns="0" anchor="t">
+            <a:spAutoFit/>
+          </a:bodyPr>
+          <a:lstStyle/>
+          <a:p>
+            <a:pPr algn="l">
+              <a:lnSpc>
+                <a:spcPct val="120000"/>
+              </a:lnSpc>
+            </a:pPr>
+            <a:r>
+              <a:rPr sz="1050" b="0">
+                <a:solidFill>
+                  <a:srgbClr val="FF8A3D"/>
+                </a:solidFill>
+                <a:latin typeface="Inter"/>
+              </a:rPr>
+              <a:t>genii-ai.ru</a:t>
+            </a:r>
+          </a:p>
+        </p:txBody>
+      </p:sp>
       <p:pic>
         <p:nvPicPr>
-          <p:cNvPr id="5" name="Picture 4" descr="logo.png"/>
+          <p:cNvPr id="7" name="Picture 6" descr="logo.png"/>
           <p:cNvPicPr>
             <a:picLocks noChangeAspect="1"/>
           </p:cNvPicPr>
@@ -5190,8 +5424,8 @@
         </p:blipFill>
         <p:spPr>
           <a:xfrm>
-            <a:off x="11048695" y="457200"/>
-            <a:ext cx="457200" cy="457200"/>
+            <a:off x="11121847" y="411480"/>
+            <a:ext cx="384048" cy="384048"/>
           </a:xfrm>
           <a:prstGeom prst="rect">
             <a:avLst/>
@@ -5200,52 +5434,13 @@
       </p:pic>
       <p:sp>
         <p:nvSpPr>
-          <p:cNvPr id="6" name="TextBox 5"/>
+          <p:cNvPr id="8" name="TextBox 7"/>
           <p:cNvSpPr txBox="1"/>
           <p:nvPr/>
         </p:nvSpPr>
         <p:spPr>
           <a:xfrm>
-            <a:off x="685800" y="987552"/>
-            <a:ext cx="2743200" cy="201168"/>
-          </a:xfrm>
-          <a:prstGeom prst="rect">
-            <a:avLst/>
-          </a:prstGeom>
-          <a:noFill/>
-        </p:spPr>
-        <p:txBody>
-          <a:bodyPr wrap="square" lIns="0" rIns="0" tIns="0" bIns="0" anchor="t">
-            <a:spAutoFit/>
-          </a:bodyPr>
-          <a:lstStyle/>
-          <a:p>
-            <a:pPr algn="l">
-              <a:lnSpc>
-                <a:spcPct val="120000"/>
-              </a:lnSpc>
-            </a:pPr>
-            <a:r>
-              <a:rPr sz="950" b="0">
-                <a:solidFill>
-                  <a:srgbClr val="A2978E"/>
-                </a:solidFill>
-                <a:latin typeface="Inter"/>
-              </a:rPr>
-              <a:t>ГенИИ</a:t>
-            </a:r>
-          </a:p>
-        </p:txBody>
-      </p:sp>
-      <p:sp>
-        <p:nvSpPr>
-          <p:cNvPr id="7" name="TextBox 6"/>
-          <p:cNvSpPr txBox="1"/>
-          <p:nvPr/>
-        </p:nvSpPr>
-        <p:spPr>
-          <a:xfrm>
-            <a:off x="8762695" y="987552"/>
+            <a:off x="8762695" y="850392"/>
             <a:ext cx="2743200" cy="201168"/>
           </a:xfrm>
           <a:prstGeom prst="rect">
@@ -5278,7 +5473,7 @@
       </p:sp>
       <p:sp>
         <p:nvSpPr>
-          <p:cNvPr id="8" name="TextBox 7"/>
+          <p:cNvPr id="9" name="TextBox 8"/>
           <p:cNvSpPr txBox="1"/>
           <p:nvPr/>
         </p:nvSpPr>
@@ -5317,7 +5512,7 @@
       </p:sp>
       <p:pic>
         <p:nvPicPr>
-          <p:cNvPr id="9" name="Picture 8" descr="press-qr.png"/>
+          <p:cNvPr id="10" name="Picture 9" descr="press-qr.png"/>
           <p:cNvPicPr>
             <a:picLocks noChangeAspect="1"/>
           </p:cNvPicPr>
@@ -5341,7 +5536,7 @@
       </p:pic>
       <p:sp>
         <p:nvSpPr>
-          <p:cNvPr id="10" name="TextBox 9"/>
+          <p:cNvPr id="11" name="TextBox 10"/>
           <p:cNvSpPr txBox="1"/>
           <p:nvPr/>
         </p:nvSpPr>
@@ -5380,7 +5575,7 @@
       </p:sp>
       <p:sp>
         <p:nvSpPr>
-          <p:cNvPr id="11" name="TextBox 10"/>
+          <p:cNvPr id="12" name="TextBox 11"/>
           <p:cNvSpPr txBox="1"/>
           <p:nvPr/>
         </p:nvSpPr>
@@ -5419,7 +5614,7 @@
       </p:sp>
       <p:sp>
         <p:nvSpPr>
-          <p:cNvPr id="12" name="TextBox 11"/>
+          <p:cNvPr id="13" name="TextBox 12"/>
           <p:cNvSpPr txBox="1"/>
           <p:nvPr/>
         </p:nvSpPr>
@@ -5458,7 +5653,7 @@
       </p:sp>
       <p:sp>
         <p:nvSpPr>
-          <p:cNvPr id="13" name="TextBox 12"/>
+          <p:cNvPr id="14" name="TextBox 13"/>
           <p:cNvSpPr txBox="1"/>
           <p:nvPr/>
         </p:nvSpPr>
@@ -5497,7 +5692,7 @@
       </p:sp>
       <p:sp>
         <p:nvSpPr>
-          <p:cNvPr id="14" name="TextBox 13"/>
+          <p:cNvPr id="15" name="TextBox 14"/>
           <p:cNvSpPr txBox="1"/>
           <p:nvPr/>
         </p:nvSpPr>
@@ -5536,7 +5731,7 @@
       </p:sp>
       <p:sp>
         <p:nvSpPr>
-          <p:cNvPr id="15" name="Rectangle 14"/>
+          <p:cNvPr id="16" name="Rectangle 15"/>
           <p:cNvSpPr/>
           <p:nvPr/>
         </p:nvSpPr>
@@ -5580,7 +5775,7 @@
       </p:sp>
       <p:sp>
         <p:nvSpPr>
-          <p:cNvPr id="16" name="TextBox 15"/>
+          <p:cNvPr id="17" name="TextBox 16"/>
           <p:cNvSpPr txBox="1"/>
           <p:nvPr/>
         </p:nvSpPr>
@@ -5619,7 +5814,7 @@
       </p:sp>
       <p:sp>
         <p:nvSpPr>
-          <p:cNvPr id="17" name="TextBox 16"/>
+          <p:cNvPr id="18" name="TextBox 17"/>
           <p:cNvSpPr txBox="1"/>
           <p:nvPr/>
         </p:nvSpPr>
